--- a/Insurance_Price_Prediction_Final_Presentation.pptx
+++ b/Insurance_Price_Prediction_Final_Presentation.pptx
@@ -17694,12 +17694,12 @@
           <a:lstStyle/>
           <a:p>
             <a:r>
-              <a:t>Capstone Project — Final Presentation</a:t>
+              <a:t>Capstone Project - Final Presentation</a:t>
             </a:r>
           </a:p>
           <a:p>
             <a:r>
-              <a:t>Group &lt;&lt; n &gt;&gt;  ·  Batch &lt;&lt; year &gt;&gt;  ·  Mentor: &lt;&lt; Name &gt;&gt;</a:t>
+              <a:t>Group &lt;&lt; n &gt;&gt;  -  Batch &lt;&lt; year &gt;&gt;  -  Mentor: &lt;&lt; Name &gt;&gt;</a:t>
             </a:r>
           </a:p>
         </p:txBody>
@@ -17793,7 +17793,7 @@
                         <a:defRPr sz="1100" b="1"/>
                       </a:pPr>
                       <a:r>
-                        <a:t>Train R²</a:t>
+                        <a:t>Train R2</a:t>
                       </a:r>
                     </a:p>
                   </a:txBody>
@@ -17808,7 +17808,7 @@
                         <a:defRPr sz="1100" b="1"/>
                       </a:pPr>
                       <a:r>
-                        <a:t>Test R²</a:t>
+                        <a:t>Test R2</a:t>
                       </a:r>
                     </a:p>
                   </a:txBody>
@@ -18422,7 +18422,7 @@
           <a:lstStyle/>
           <a:p>
             <a:r>
-              <a:t>Final Model &amp; Evaluation — LightGBM</a:t>
+              <a:t>Final Model &amp; Evaluation - LightGBM</a:t>
             </a:r>
           </a:p>
         </p:txBody>
@@ -18480,7 +18480,7 @@
               <a:defRPr sz="1300"/>
             </a:pPr>
             <a:r>
-              <a:t>• Selected for lowest test RMSE/MAE, strong R², stable CV, small train/test gap.</a:t>
+              <a:t>- Selected for lowest test RMSE/MAE, strong R2, stable CV, small train/test gap.</a:t>
             </a:r>
           </a:p>
           <a:p>
@@ -18491,7 +18491,7 @@
               <a:defRPr sz="1300"/>
             </a:pPr>
             <a:r>
-              <a:t>• Test MAE: 2,328</a:t>
+              <a:t>- Test MAE: 2,328</a:t>
             </a:r>
           </a:p>
           <a:p>
@@ -18502,7 +18502,7 @@
               <a:defRPr sz="1300"/>
             </a:pPr>
             <a:r>
-              <a:t>• Test RMSE: 2,909</a:t>
+              <a:t>- Test RMSE: 2,909</a:t>
             </a:r>
           </a:p>
           <a:p>
@@ -18513,7 +18513,7 @@
               <a:defRPr sz="1300"/>
             </a:pPr>
             <a:r>
-              <a:t>• Test R²: 0.9585</a:t>
+              <a:t>- Test R2: 0.9585</a:t>
             </a:r>
           </a:p>
           <a:p>
@@ -18524,7 +18524,7 @@
               <a:defRPr sz="1300"/>
             </a:pPr>
             <a:r>
-              <a:t>• Test MAPE: 11.3%</a:t>
+              <a:t>- Test MAPE: 11.3%</a:t>
             </a:r>
           </a:p>
           <a:p>
@@ -18535,7 +18535,7 @@
               <a:defRPr sz="1300"/>
             </a:pPr>
             <a:r>
-              <a:t>• Residuals centred &amp; homoscedastic; predictions track actuals.</a:t>
+              <a:t>- Residuals centred &amp; homoscedastic; predictions track actuals.</a:t>
             </a:r>
           </a:p>
         </p:txBody>
@@ -18574,7 +18574,7 @@
           <a:lstStyle/>
           <a:p>
             <a:r>
-              <a:t>Explainability — Permutation + SHAP</a:t>
+              <a:t>Explainability - Permutation + SHAP</a:t>
             </a:r>
           </a:p>
         </p:txBody>
@@ -18632,7 +18632,7 @@
               <a:defRPr sz="1300"/>
             </a:pPr>
             <a:r>
-              <a:t>• Two independent methods agree on the drivers:</a:t>
+              <a:t>- Two independent methods agree on the drivers:</a:t>
             </a:r>
           </a:p>
           <a:p>
@@ -18643,7 +18643,7 @@
               <a:defRPr sz="1200"/>
             </a:pPr>
             <a:r>
-              <a:t>   – weight (dominant)</a:t>
+              <a:t>   - weight (dominant)</a:t>
             </a:r>
           </a:p>
           <a:p>
@@ -18654,7 +18654,7 @@
               <a:defRPr sz="1200"/>
             </a:pPr>
             <a:r>
-              <a:t>   – admission recency / history</a:t>
+              <a:t>   - admission recency / history</a:t>
             </a:r>
           </a:p>
           <a:p>
@@ -18665,7 +18665,7 @@
               <a:defRPr sz="1200"/>
             </a:pPr>
             <a:r>
-              <a:t>   – other-insurer coverage</a:t>
+              <a:t>   - other-insurer coverage</a:t>
             </a:r>
           </a:p>
           <a:p>
@@ -18676,7 +18676,7 @@
               <a:defRPr sz="1200"/>
             </a:pPr>
             <a:r>
-              <a:t>   – preventive checkups, weight change</a:t>
+              <a:t>   - preventive checkups, weight change</a:t>
             </a:r>
           </a:p>
           <a:p>
@@ -18687,7 +18687,7 @@
               <a:defRPr sz="1300"/>
             </a:pPr>
             <a:r>
-              <a:t>• SHAP shows effect direction (higher weight → higher cost).</a:t>
+              <a:t>- SHAP shows effect direction (higher weight -&gt; higher cost).</a:t>
             </a:r>
           </a:p>
         </p:txBody>
@@ -18726,7 +18726,7 @@
           <a:lstStyle/>
           <a:p>
             <a:r>
-              <a:t>Business Insights — Lift / Gains</a:t>
+              <a:t>Business Insights - Lift / Gains</a:t>
             </a:r>
           </a:p>
         </p:txBody>
@@ -18784,7 +18784,7 @@
               <a:defRPr sz="1300"/>
             </a:pPr>
             <a:r>
-              <a:t>• Applicants sorted by predicted cost into deciles.</a:t>
+              <a:t>- Applicants sorted by predicted cost into deciles.</a:t>
             </a:r>
           </a:p>
           <a:p>
@@ -18795,7 +18795,7 @@
               <a:defRPr sz="1300"/>
             </a:pPr>
             <a:r>
-              <a:t>• Top deciles carry lift well above 1.0.</a:t>
+              <a:t>- Top deciles carry lift well above 1.0.</a:t>
             </a:r>
           </a:p>
           <a:p>
@@ -18806,7 +18806,7 @@
               <a:defRPr sz="1300"/>
             </a:pPr>
             <a:r>
-              <a:t>• Cumulative-gains curve sits above random.</a:t>
+              <a:t>- Cumulative-gains curve sits above random.</a:t>
             </a:r>
           </a:p>
           <a:p>
@@ -18817,7 +18817,7 @@
               <a:defRPr sz="1300"/>
             </a:pPr>
             <a:r>
-              <a:t>• → Effective ranking for underwriting triage and</a:t>
+              <a:t>- -&gt; Effective ranking for underwriting triage and</a:t>
             </a:r>
           </a:p>
           <a:p>
@@ -18828,7 +18828,7 @@
               <a:defRPr sz="1200"/>
             </a:pPr>
             <a:r>
-              <a:t>   – targeting high-cost segments.</a:t>
+              <a:t>   - targeting high-cost segments.</a:t>
             </a:r>
           </a:p>
         </p:txBody>
@@ -18957,7 +18957,7 @@
           <a:lstStyle/>
           <a:p>
             <a:r>
-              <a:t>Deployment Showcase</a:t>
+              <a:t>Deployment</a:t>
             </a:r>
           </a:p>
         </p:txBody>
@@ -18987,7 +18987,7 @@
             <a:pPr/>
             <a:r>
               <a:rPr sz="1400"/>
-              <a:t>FastAPI service: /health, /schema, /predict → cost + Low/Medium/High risk + top drivers.</a:t>
+              <a:t>FastAPI service: /health, /schema, /predict -&gt; cost + Low/Medium/High risk + top drivers.</a:t>
             </a:r>
           </a:p>
           <a:p>
@@ -19086,7 +19086,7 @@
           <a:lstStyle/>
           <a:p>
             <a:r>
-              <a:t>Appendix — Data Background</a:t>
+              <a:t>Appendix - Data Background</a:t>
             </a:r>
           </a:p>
         </p:txBody>
@@ -19109,7 +19109,7 @@
             <a:pPr/>
             <a:r>
               <a:rPr sz="1400"/>
-              <a:t>Source: Insurance Data.csv — 25,000 rows × 24 columns; target insurance_cost.</a:t>
+              <a:t>Source: Insurance Data.csv - 25,000 rows x 24 columns; target insurance_cost.</a:t>
             </a:r>
           </a:p>
           <a:p>
@@ -19169,7 +19169,7 @@
           <a:lstStyle/>
           <a:p>
             <a:r>
-              <a:t>Appendix — Permutation Importance</a:t>
+              <a:t>Appendix - Permutation Importance</a:t>
             </a:r>
           </a:p>
         </p:txBody>
@@ -19385,7 +19385,7 @@
             <a:pPr/>
             <a:r>
               <a:rPr sz="1400"/>
-              <a:t>Deployment Showcase</a:t>
+              <a:t>Deployment</a:t>
             </a:r>
           </a:p>
           <a:p>
@@ -19461,7 +19461,7 @@
             <a:pPr/>
             <a:r>
               <a:rPr sz="1400"/>
-              <a:t>Final model: LightGBM — Test R² = 0.958, MAE = 2,328, RMSE = 2,909 (beats the reference solution).</a:t>
+              <a:t>Final model: LightGBM - Test R2 = 0.958, MAE = 2,328, RMSE = 2,909 (beats the reference solution).</a:t>
             </a:r>
           </a:p>
           <a:p>
@@ -19579,7 +19579,7 @@
             <a:pPr lvl="1"/>
             <a:r>
               <a:rPr sz="1200"/>
-              <a:t>Tune the best family; select on RMSE/MAE/R² + stability + overfit gap.</a:t>
+              <a:t>Tune the best family; select on RMSE/MAE/R2 + stability + overfit gap.</a:t>
             </a:r>
           </a:p>
           <a:p>
@@ -19648,14 +19648,14 @@
             <a:pPr/>
             <a:r>
               <a:rPr sz="1400"/>
-              <a:t>25,000 applicants × 24 columns; one row per applicant; no duplicate rows.</a:t>
+              <a:t>25,000 applicants x 24 columns; one row per applicant; no duplicate rows.</a:t>
             </a:r>
           </a:p>
           <a:p>
             <a:pPr/>
             <a:r>
               <a:rPr sz="1400"/>
-              <a:t>Target insurance_cost: mean ≈ 27,147, mild right skew (≈ 0.33).</a:t>
+              <a:t>Target insurance_cost: mean ~ 27,147, mild right skew (~ 0.33).</a:t>
             </a:r>
           </a:p>
           <a:p>
@@ -19669,14 +19669,14 @@
             <a:pPr lvl="1"/>
             <a:r>
               <a:rPr sz="1200"/>
-              <a:t>Year_last_admitted — 47.5% (meaningful: indicates no prior admission)</a:t>
+              <a:t>Year_last_admitted - 47.5% (meaningful: indicates no prior admission)</a:t>
             </a:r>
           </a:p>
           <a:p>
             <a:pPr lvl="1"/>
             <a:r>
               <a:rPr sz="1200"/>
-              <a:t>bmi — 4.0% (imputed by age-band × gender median)</a:t>
+              <a:t>bmi - 4.0% (imputed by age-band x gender median)</a:t>
             </a:r>
           </a:p>
           <a:p>
@@ -19690,7 +19690,7 @@
             <a:pPr/>
             <a:r>
               <a:rPr sz="1400"/>
-              <a:t>Fixed source typos in column names and the 'Salried' → 'Salaried' category.</a:t>
+              <a:t>Fixed source typos in column names and the 'Salried' -&gt; 'Salaried' category.</a:t>
             </a:r>
           </a:p>
         </p:txBody>
@@ -19729,7 +19729,7 @@
           <a:lstStyle/>
           <a:p>
             <a:r>
-              <a:t>EDA — Distributions of Continuous Attributes</a:t>
+              <a:t>EDA - Distributions of Continuous Attributes</a:t>
             </a:r>
           </a:p>
         </p:txBody>
@@ -19827,7 +19827,7 @@
           <a:lstStyle/>
           <a:p>
             <a:r>
-              <a:t>EDA — Key Relationships</a:t>
+              <a:t>EDA - Key Relationships</a:t>
             </a:r>
           </a:p>
         </p:txBody>
@@ -19885,7 +19885,7 @@
               <a:defRPr sz="1300"/>
             </a:pPr>
             <a:r>
-              <a:t>• weight has an unusually strong positive link to cost — the dominant signal.</a:t>
+              <a:t>- weight has an unusually strong positive link to cost - the dominant signal.</a:t>
             </a:r>
           </a:p>
           <a:p>
@@ -19896,7 +19896,7 @@
               <a:defRPr sz="1300"/>
             </a:pPr>
             <a:r>
-              <a:t>• Higher cost for applicants covered by another insurer and adventure-sports participants.</a:t>
+              <a:t>- Higher cost for applicants covered by another insurer and adventure-sports participants.</a:t>
             </a:r>
           </a:p>
           <a:p>
@@ -19907,7 +19907,7 @@
               <a:defRPr sz="1300"/>
             </a:pPr>
             <a:r>
-              <a:t>• Admission history adds useful risk information.</a:t>
+              <a:t>- Admission history adds useful risk information.</a:t>
             </a:r>
           </a:p>
           <a:p>
@@ -19918,7 +19918,7 @@
               <a:defRPr sz="1300"/>
             </a:pPr>
             <a:r>
-              <a:t>• Lifestyle effects act mainly through nonlinear interactions captured by boosting.</a:t>
+              <a:t>- Lifestyle effects act mainly through nonlinear interactions captured by boosting.</a:t>
             </a:r>
           </a:p>
           <a:p>
@@ -19929,7 +19929,7 @@
               <a:defRPr sz="1200"/>
             </a:pPr>
             <a:r>
-              <a:t>   – Flagged: validate weight dominance for plausibility/leakage.</a:t>
+              <a:t>   - Flagged: validate weight dominance for plausibility/leakage.</a:t>
             </a:r>
           </a:p>
         </p:txBody>
@@ -19998,7 +19998,7 @@
             <a:pPr/>
             <a:r>
               <a:rPr sz="1400"/>
-              <a:t>Missing values: grouped-median BMI imputation; Year_last_admitted → was_admitted_before + years_since_last_admitted.</a:t>
+              <a:t>Missing values: grouped-median BMI imputation; Year_last_admitted -&gt; was_admitted_before + years_since_last_admitted.</a:t>
             </a:r>
           </a:p>
           <a:p>
@@ -20019,7 +20019,7 @@
             <a:pPr/>
             <a:r>
               <a:rPr sz="1400"/>
-              <a:t>Leak-free sklearn Pipeline: feature engineering → impute + scale + one-hot → model (fit on training data only).</a:t>
+              <a:t>Leak-free sklearn Pipeline: feature engineering -&gt; impute + scale + one-hot -&gt; model (fit on training data only).</a:t>
             </a:r>
           </a:p>
         </p:txBody>
@@ -20102,21 +20102,21 @@
             <a:pPr lvl="1"/>
             <a:r>
               <a:rPr sz="1200"/>
-              <a:t>MAE — average pricing error in cost units (primary, business-readable).</a:t>
+              <a:t>MAE - average pricing error in cost units (primary, business-readable).</a:t>
             </a:r>
           </a:p>
           <a:p>
             <a:pPr lvl="1"/>
             <a:r>
               <a:rPr sz="1200"/>
-              <a:t>RMSE — penalises larger errors; R² — variance explained.</a:t>
+              <a:t>RMSE - penalises larger errors; R2 - variance explained.</a:t>
             </a:r>
           </a:p>
           <a:p>
             <a:pPr lvl="1"/>
             <a:r>
               <a:rPr sz="1200"/>
-              <a:t>MAPE/SMAPE — percentage errors; CV RMSE &amp; train-test gap — stability/overfit.</a:t>
+              <a:t>MAPE/SMAPE - percentage errors; CV RMSE &amp; train-test gap - stability/overfit.</a:t>
             </a:r>
           </a:p>
         </p:txBody>
